--- a/selfcafe-fc-deck/selfcafe-fc-deck.pptx
+++ b/selfcafe-fc-deck/selfcafe-fc-deck.pptx
@@ -197,9 +197,9 @@
           </c:dLbls>
           <c:cat>
             <c:multiLvlStrRef>
-              <c:f>Sheet1!$A$2:$A$49</c:f>
+              <c:f>Sheet1!$A$2:$A$48</c:f>
               <c:multiLvlStrCache>
-                <c:ptCount val="48"/>
+                <c:ptCount val="47"/>
                 <c:lvl>
                   <c:pt idx="0">
                     <c:v>2022.09</c:v>
@@ -340,10 +340,7 @@
                     <c:v/>
                   </c:pt>
                   <c:pt idx="46">
-                    <c:v/>
-                  </c:pt>
-                  <c:pt idx="47">
-                    <c:v>2026.08</c:v>
+                    <c:v>2026.07</c:v>
                   </c:pt>
                 </c:lvl>
               </c:multiLvlStrCache>
@@ -351,10 +348,10 @@
           </c:cat>
           <c:val>
             <c:numRef>
-              <c:f>Sheet1!$B$2:$B$49</c:f>
+              <c:f>Sheet1!$B$2:$B$48</c:f>
               <c:numCache>
                 <c:formatCode>General</c:formatCode>
-                <c:ptCount val="48"/>
+                <c:ptCount val="47"/>
                 <c:pt idx="0">
                   <c:v>1</c:v>
                 </c:pt>
@@ -479,25 +476,22 @@
                   <c:v>51</c:v>
                 </c:pt>
                 <c:pt idx="41">
-                  <c:v>53</c:v>
+                  <c:v>55</c:v>
                 </c:pt>
                 <c:pt idx="42">
                   <c:v>58</c:v>
                 </c:pt>
                 <c:pt idx="43">
-                  <c:v>60</c:v>
+                  <c:v>61</c:v>
                 </c:pt>
                 <c:pt idx="44">
-                  <c:v>63</c:v>
+                  <c:v>64</c:v>
                 </c:pt>
                 <c:pt idx="45">
-                  <c:v>65</c:v>
+                  <c:v>67</c:v>
                 </c:pt>
                 <c:pt idx="46">
-                  <c:v>68</c:v>
-                </c:pt>
-                <c:pt idx="47">
-                  <c:v>70</c:v>
+                  <c:v>71</c:v>
                 </c:pt>
               </c:numCache>
             </c:numRef>
@@ -938,7 +932,7 @@
                   <c:v>51</c:v>
                 </c:pt>
                 <c:pt idx="7">
-                  <c:v>68</c:v>
+                  <c:v>71</c:v>
                 </c:pt>
               </c:numCache>
             </c:numRef>
@@ -1070,7 +1064,7 @@
         <c:axId val="2094734553"/>
         <c:scaling>
           <c:orientation val="minMax"/>
-          <c:max val="70"/>
+          <c:max val="80"/>
           <c:min val="0"/>
         </c:scaling>
         <c:delete val="0"/>
@@ -4842,7 +4836,7 @@
         <p:spPr>
           <a:xfrm>
             <a:off x="822960" y="3364992"/>
-            <a:ext cx="1817827" cy="457200"/>
+            <a:ext cx="1514246" cy="457200"/>
           </a:xfrm>
           <a:prstGeom prst="roundRect">
             <a:avLst>
@@ -4893,7 +4887,7 @@
         <p:spPr>
           <a:xfrm>
             <a:off x="1298448" y="3364992"/>
-            <a:ext cx="1250899" cy="457200"/>
+            <a:ext cx="947318" cy="457200"/>
           </a:xfrm>
           <a:prstGeom prst="rect">
             <a:avLst/>
@@ -4917,7 +4911,7 @@
                 <a:ea typeface="Noto Sans JP" pitchFamily="34" charset="-122"/>
                 <a:cs typeface="Noto Sans JP" pitchFamily="34" charset="-120"/>
               </a:rPr>
-              <a:t>全国70店舗以上</a:t>
+              <a:t>全国71店舗</a:t>
             </a:r>
             <a:endParaRPr lang="en-US" sz="1150" dirty="0"/>
           </a:p>
@@ -4931,7 +4925,7 @@
         </p:nvSpPr>
         <p:spPr>
           <a:xfrm>
-            <a:off x="2823667" y="3364992"/>
+            <a:off x="2520086" y="3364992"/>
             <a:ext cx="2576779" cy="457200"/>
           </a:xfrm>
           <a:prstGeom prst="roundRect">
@@ -4966,7 +4960,7 @@
         </p:blipFill>
         <p:spPr>
           <a:xfrm>
-            <a:off x="3006547" y="3488436"/>
+            <a:off x="2702966" y="3488436"/>
             <a:ext cx="210312" cy="210312"/>
           </a:xfrm>
           <a:prstGeom prst="rect">
@@ -4982,7 +4976,7 @@
         </p:nvSpPr>
         <p:spPr>
           <a:xfrm>
-            <a:off x="3299155" y="3364992"/>
+            <a:off x="2995574" y="3364992"/>
             <a:ext cx="2009851" cy="457200"/>
           </a:xfrm>
           <a:prstGeom prst="rect">
@@ -5021,7 +5015,7 @@
         </p:nvSpPr>
         <p:spPr>
           <a:xfrm>
-            <a:off x="5583326" y="3364992"/>
+            <a:off x="5279746" y="3364992"/>
             <a:ext cx="2121408" cy="457200"/>
           </a:xfrm>
           <a:prstGeom prst="roundRect">
@@ -5056,7 +5050,7 @@
         </p:blipFill>
         <p:spPr>
           <a:xfrm>
-            <a:off x="5766206" y="3488436"/>
+            <a:off x="5462626" y="3488436"/>
             <a:ext cx="210312" cy="210312"/>
           </a:xfrm>
           <a:prstGeom prst="rect">
@@ -5072,7 +5066,7 @@
         </p:nvSpPr>
         <p:spPr>
           <a:xfrm>
-            <a:off x="6058814" y="3364992"/>
+            <a:off x="5755234" y="3364992"/>
             <a:ext cx="1554480" cy="457200"/>
           </a:xfrm>
           <a:prstGeom prst="rect">
@@ -32572,7 +32566,7 @@
                 <a:ea typeface="Noto Sans JP" pitchFamily="34" charset="-122"/>
                 <a:cs typeface="Noto Sans JP" pitchFamily="34" charset="-120"/>
               </a:rPr>
-              <a:t>主な展開エリア</a:t>
+              <a:t>展開エリア（2026年7月時点）</a:t>
             </a:r>
             <a:endParaRPr lang="en-US" sz="1050" dirty="0"/>
           </a:p>
@@ -32611,7 +32605,7 @@
                 <a:ea typeface="Arial" pitchFamily="34" charset="-122"/>
                 <a:cs typeface="Arial" pitchFamily="34" charset="-120"/>
               </a:rPr>
-              <a:t>70</a:t>
+              <a:t>71</a:t>
             </a:r>
             <a:pPr algn="l" indent="0" marL="0">
               <a:buNone/>
@@ -32625,7 +32619,7 @@
                 <a:ea typeface="Noto Sans JP" pitchFamily="34" charset="-122"/>
                 <a:cs typeface="Noto Sans JP" pitchFamily="34" charset="-120"/>
               </a:rPr>
-              <a:t> 店舗以上</a:t>
+              <a:t> 店舗</a:t>
             </a:r>
             <a:endParaRPr lang="en-US" sz="4600" dirty="0"/>
           </a:p>
@@ -32659,8 +32653,8 @@
         </p:nvSpPr>
         <p:spPr>
           <a:xfrm>
-            <a:off x="7260336" y="2798064"/>
-            <a:ext cx="1828800" cy="256032"/>
+            <a:off x="7260336" y="2779776"/>
+            <a:ext cx="1828800" cy="219456"/>
           </a:xfrm>
           <a:prstGeom prst="rect">
             <a:avLst/>
@@ -32676,7 +32670,7 @@
               <a:buNone/>
             </a:pPr>
             <a:r>
-              <a:rPr lang="en-US" sz="1150" dirty="0">
+              <a:rPr lang="en-US" sz="1050" dirty="0">
                 <a:solidFill>
                   <a:srgbClr val="3B3833"/>
                 </a:solidFill>
@@ -32686,7 +32680,7 @@
               </a:rPr>
               <a:t>愛知県</a:t>
             </a:r>
-            <a:endParaRPr lang="en-US" sz="1150" dirty="0"/>
+            <a:endParaRPr lang="en-US" sz="1050" dirty="0"/>
           </a:p>
         </p:txBody>
       </p:sp>
@@ -32698,8 +32692,8 @@
         </p:nvSpPr>
         <p:spPr>
           <a:xfrm>
-            <a:off x="9787738" y="2798064"/>
-            <a:ext cx="1426464" cy="256032"/>
+            <a:off x="9787738" y="2779776"/>
+            <a:ext cx="1426464" cy="219456"/>
           </a:xfrm>
           <a:prstGeom prst="rect">
             <a:avLst/>
@@ -32715,7 +32709,7 @@
               <a:buNone/>
             </a:pPr>
             <a:r>
-              <a:rPr lang="en-US" sz="1150" b="1" dirty="0">
+              <a:rPr lang="en-US" sz="1050" b="1" dirty="0">
                 <a:solidFill>
                   <a:srgbClr val="1B5E20"/>
                 </a:solidFill>
@@ -32723,9 +32717,9 @@
                 <a:ea typeface="Noto Sans JP" pitchFamily="34" charset="-122"/>
                 <a:cs typeface="Noto Sans JP" pitchFamily="34" charset="-120"/>
               </a:rPr>
-              <a:t>35 店舗</a:t>
-            </a:r>
-            <a:endParaRPr lang="en-US" sz="1150" dirty="0"/>
+              <a:t>36 店舗</a:t>
+            </a:r>
+            <a:endParaRPr lang="en-US" sz="1050" dirty="0"/>
           </a:p>
         </p:txBody>
       </p:sp>
@@ -32737,8 +32731,8 @@
         </p:nvSpPr>
         <p:spPr>
           <a:xfrm>
-            <a:off x="7260336" y="3072384"/>
-            <a:ext cx="1828800" cy="256032"/>
+            <a:off x="7260336" y="3010205"/>
+            <a:ext cx="1828800" cy="219456"/>
           </a:xfrm>
           <a:prstGeom prst="rect">
             <a:avLst/>
@@ -32754,7 +32748,7 @@
               <a:buNone/>
             </a:pPr>
             <a:r>
-              <a:rPr lang="en-US" sz="1150" dirty="0">
+              <a:rPr lang="en-US" sz="1050" dirty="0">
                 <a:solidFill>
                   <a:srgbClr val="3B3833"/>
                 </a:solidFill>
@@ -32764,7 +32758,7 @@
               </a:rPr>
               <a:t>大阪府</a:t>
             </a:r>
-            <a:endParaRPr lang="en-US" sz="1150" dirty="0"/>
+            <a:endParaRPr lang="en-US" sz="1050" dirty="0"/>
           </a:p>
         </p:txBody>
       </p:sp>
@@ -32776,8 +32770,8 @@
         </p:nvSpPr>
         <p:spPr>
           <a:xfrm>
-            <a:off x="9787738" y="3072384"/>
-            <a:ext cx="1426464" cy="256032"/>
+            <a:off x="9787738" y="3010205"/>
+            <a:ext cx="1426464" cy="219456"/>
           </a:xfrm>
           <a:prstGeom prst="rect">
             <a:avLst/>
@@ -32793,7 +32787,7 @@
               <a:buNone/>
             </a:pPr>
             <a:r>
-              <a:rPr lang="en-US" sz="1150" b="1" dirty="0">
+              <a:rPr lang="en-US" sz="1050" b="1" dirty="0">
                 <a:solidFill>
                   <a:srgbClr val="1B5E20"/>
                 </a:solidFill>
@@ -32803,7 +32797,7 @@
               </a:rPr>
               <a:t>18 店舗</a:t>
             </a:r>
-            <a:endParaRPr lang="en-US" sz="1150" dirty="0"/>
+            <a:endParaRPr lang="en-US" sz="1050" dirty="0"/>
           </a:p>
         </p:txBody>
       </p:sp>
@@ -32815,8 +32809,8 @@
         </p:nvSpPr>
         <p:spPr>
           <a:xfrm>
-            <a:off x="7260336" y="3346704"/>
-            <a:ext cx="1828800" cy="256032"/>
+            <a:off x="7260336" y="3240634"/>
+            <a:ext cx="1828800" cy="219456"/>
           </a:xfrm>
           <a:prstGeom prst="rect">
             <a:avLst/>
@@ -32832,7 +32826,7 @@
               <a:buNone/>
             </a:pPr>
             <a:r>
-              <a:rPr lang="en-US" sz="1150" dirty="0">
+              <a:rPr lang="en-US" sz="1050" dirty="0">
                 <a:solidFill>
                   <a:srgbClr val="3B3833"/>
                 </a:solidFill>
@@ -32842,7 +32836,7 @@
               </a:rPr>
               <a:t>東京都</a:t>
             </a:r>
-            <a:endParaRPr lang="en-US" sz="1150" dirty="0"/>
+            <a:endParaRPr lang="en-US" sz="1050" dirty="0"/>
           </a:p>
         </p:txBody>
       </p:sp>
@@ -32854,8 +32848,8 @@
         </p:nvSpPr>
         <p:spPr>
           <a:xfrm>
-            <a:off x="9787738" y="3346704"/>
-            <a:ext cx="1426464" cy="256032"/>
+            <a:off x="9787738" y="3240634"/>
+            <a:ext cx="1426464" cy="219456"/>
           </a:xfrm>
           <a:prstGeom prst="rect">
             <a:avLst/>
@@ -32871,7 +32865,7 @@
               <a:buNone/>
             </a:pPr>
             <a:r>
-              <a:rPr lang="en-US" sz="1150" b="1" dirty="0">
+              <a:rPr lang="en-US" sz="1050" b="1" dirty="0">
                 <a:solidFill>
                   <a:srgbClr val="1B5E20"/>
                 </a:solidFill>
@@ -32879,9 +32873,9 @@
                 <a:ea typeface="Noto Sans JP" pitchFamily="34" charset="-122"/>
                 <a:cs typeface="Noto Sans JP" pitchFamily="34" charset="-120"/>
               </a:rPr>
-              <a:t>5 店舗</a:t>
-            </a:r>
-            <a:endParaRPr lang="en-US" sz="1150" dirty="0"/>
+              <a:t>7 店舗</a:t>
+            </a:r>
+            <a:endParaRPr lang="en-US" sz="1050" dirty="0"/>
           </a:p>
         </p:txBody>
       </p:sp>
@@ -32893,8 +32887,8 @@
         </p:nvSpPr>
         <p:spPr>
           <a:xfrm>
-            <a:off x="7260336" y="3621024"/>
-            <a:ext cx="1828800" cy="256032"/>
+            <a:off x="7260336" y="3471062"/>
+            <a:ext cx="1828800" cy="219456"/>
           </a:xfrm>
           <a:prstGeom prst="rect">
             <a:avLst/>
@@ -32910,7 +32904,7 @@
               <a:buNone/>
             </a:pPr>
             <a:r>
-              <a:rPr lang="en-US" sz="1150" dirty="0">
+              <a:rPr lang="en-US" sz="1050" dirty="0">
                 <a:solidFill>
                   <a:srgbClr val="3B3833"/>
                 </a:solidFill>
@@ -32920,7 +32914,7 @@
               </a:rPr>
               <a:t>岩手県</a:t>
             </a:r>
-            <a:endParaRPr lang="en-US" sz="1150" dirty="0"/>
+            <a:endParaRPr lang="en-US" sz="1050" dirty="0"/>
           </a:p>
         </p:txBody>
       </p:sp>
@@ -32932,8 +32926,8 @@
         </p:nvSpPr>
         <p:spPr>
           <a:xfrm>
-            <a:off x="9787738" y="3621024"/>
-            <a:ext cx="1426464" cy="256032"/>
+            <a:off x="9787738" y="3471062"/>
+            <a:ext cx="1426464" cy="219456"/>
           </a:xfrm>
           <a:prstGeom prst="rect">
             <a:avLst/>
@@ -32949,7 +32943,7 @@
               <a:buNone/>
             </a:pPr>
             <a:r>
-              <a:rPr lang="en-US" sz="1150" b="1" dirty="0">
+              <a:rPr lang="en-US" sz="1050" b="1" dirty="0">
                 <a:solidFill>
                   <a:srgbClr val="1B5E20"/>
                 </a:solidFill>
@@ -32959,7 +32953,7 @@
               </a:rPr>
               <a:t>2 店舗</a:t>
             </a:r>
-            <a:endParaRPr lang="en-US" sz="1150" dirty="0"/>
+            <a:endParaRPr lang="en-US" sz="1050" dirty="0"/>
           </a:p>
         </p:txBody>
       </p:sp>
@@ -32971,8 +32965,8 @@
         </p:nvSpPr>
         <p:spPr>
           <a:xfrm>
-            <a:off x="7260336" y="3895344"/>
-            <a:ext cx="1828800" cy="256032"/>
+            <a:off x="7260336" y="3701491"/>
+            <a:ext cx="1828800" cy="219456"/>
           </a:xfrm>
           <a:prstGeom prst="rect">
             <a:avLst/>
@@ -32988,7 +32982,7 @@
               <a:buNone/>
             </a:pPr>
             <a:r>
-              <a:rPr lang="en-US" sz="1150" dirty="0">
+              <a:rPr lang="en-US" sz="1050" dirty="0">
                 <a:solidFill>
                   <a:srgbClr val="3B3833"/>
                 </a:solidFill>
@@ -32998,7 +32992,7 @@
               </a:rPr>
               <a:t>岐阜県</a:t>
             </a:r>
-            <a:endParaRPr lang="en-US" sz="1150" dirty="0"/>
+            <a:endParaRPr lang="en-US" sz="1050" dirty="0"/>
           </a:p>
         </p:txBody>
       </p:sp>
@@ -33010,8 +33004,8 @@
         </p:nvSpPr>
         <p:spPr>
           <a:xfrm>
-            <a:off x="9787738" y="3895344"/>
-            <a:ext cx="1426464" cy="256032"/>
+            <a:off x="9787738" y="3701491"/>
+            <a:ext cx="1426464" cy="219456"/>
           </a:xfrm>
           <a:prstGeom prst="rect">
             <a:avLst/>
@@ -33027,7 +33021,7 @@
               <a:buNone/>
             </a:pPr>
             <a:r>
-              <a:rPr lang="en-US" sz="1150" b="1" dirty="0">
+              <a:rPr lang="en-US" sz="1050" b="1" dirty="0">
                 <a:solidFill>
                   <a:srgbClr val="1B5E20"/>
                 </a:solidFill>
@@ -33037,7 +33031,7 @@
               </a:rPr>
               <a:t>2 店舗</a:t>
             </a:r>
-            <a:endParaRPr lang="en-US" sz="1150" dirty="0"/>
+            <a:endParaRPr lang="en-US" sz="1050" dirty="0"/>
           </a:p>
         </p:txBody>
       </p:sp>
@@ -33049,8 +33043,8 @@
         </p:nvSpPr>
         <p:spPr>
           <a:xfrm>
-            <a:off x="7260336" y="4169664"/>
-            <a:ext cx="1828800" cy="256032"/>
+            <a:off x="7260336" y="3931920"/>
+            <a:ext cx="1828800" cy="219456"/>
           </a:xfrm>
           <a:prstGeom prst="rect">
             <a:avLst/>
@@ -33066,7 +33060,7 @@
               <a:buNone/>
             </a:pPr>
             <a:r>
-              <a:rPr lang="en-US" sz="1150" dirty="0">
+              <a:rPr lang="en-US" sz="1050" dirty="0">
                 <a:solidFill>
                   <a:srgbClr val="3B3833"/>
                 </a:solidFill>
@@ -33076,7 +33070,7 @@
               </a:rPr>
               <a:t>埼玉県</a:t>
             </a:r>
-            <a:endParaRPr lang="en-US" sz="1150" dirty="0"/>
+            <a:endParaRPr lang="en-US" sz="1050" dirty="0"/>
           </a:p>
         </p:txBody>
       </p:sp>
@@ -33088,8 +33082,8 @@
         </p:nvSpPr>
         <p:spPr>
           <a:xfrm>
-            <a:off x="9787738" y="4169664"/>
-            <a:ext cx="1426464" cy="256032"/>
+            <a:off x="9787738" y="3931920"/>
+            <a:ext cx="1426464" cy="219456"/>
           </a:xfrm>
           <a:prstGeom prst="rect">
             <a:avLst/>
@@ -33105,7 +33099,7 @@
               <a:buNone/>
             </a:pPr>
             <a:r>
-              <a:rPr lang="en-US" sz="1150" b="1" dirty="0">
+              <a:rPr lang="en-US" sz="1050" b="1" dirty="0">
                 <a:solidFill>
                   <a:srgbClr val="1B5E20"/>
                 </a:solidFill>
@@ -33115,7 +33109,7 @@
               </a:rPr>
               <a:t>1 店舗</a:t>
             </a:r>
-            <a:endParaRPr lang="en-US" sz="1150" dirty="0"/>
+            <a:endParaRPr lang="en-US" sz="1050" dirty="0"/>
           </a:p>
         </p:txBody>
       </p:sp>
@@ -33127,8 +33121,8 @@
         </p:nvSpPr>
         <p:spPr>
           <a:xfrm>
-            <a:off x="7260336" y="4443984"/>
-            <a:ext cx="1828800" cy="256032"/>
+            <a:off x="7260336" y="4162349"/>
+            <a:ext cx="1828800" cy="219456"/>
           </a:xfrm>
           <a:prstGeom prst="rect">
             <a:avLst/>
@@ -33144,7 +33138,7 @@
               <a:buNone/>
             </a:pPr>
             <a:r>
-              <a:rPr lang="en-US" sz="1150" dirty="0">
+              <a:rPr lang="en-US" sz="1050" dirty="0">
                 <a:solidFill>
                   <a:srgbClr val="3B3833"/>
                 </a:solidFill>
@@ -33154,7 +33148,7 @@
               </a:rPr>
               <a:t>千葉県</a:t>
             </a:r>
-            <a:endParaRPr lang="en-US" sz="1150" dirty="0"/>
+            <a:endParaRPr lang="en-US" sz="1050" dirty="0"/>
           </a:p>
         </p:txBody>
       </p:sp>
@@ -33166,8 +33160,8 @@
         </p:nvSpPr>
         <p:spPr>
           <a:xfrm>
-            <a:off x="9787738" y="4443984"/>
-            <a:ext cx="1426464" cy="256032"/>
+            <a:off x="9787738" y="4162349"/>
+            <a:ext cx="1426464" cy="219456"/>
           </a:xfrm>
           <a:prstGeom prst="rect">
             <a:avLst/>
@@ -33183,7 +33177,7 @@
               <a:buNone/>
             </a:pPr>
             <a:r>
-              <a:rPr lang="en-US" sz="1150" b="1" dirty="0">
+              <a:rPr lang="en-US" sz="1050" b="1" dirty="0">
                 <a:solidFill>
                   <a:srgbClr val="1B5E20"/>
                 </a:solidFill>
@@ -33193,7 +33187,7 @@
               </a:rPr>
               <a:t>1 店舗</a:t>
             </a:r>
-            <a:endParaRPr lang="en-US" sz="1150" dirty="0"/>
+            <a:endParaRPr lang="en-US" sz="1050" dirty="0"/>
           </a:p>
         </p:txBody>
       </p:sp>
@@ -33205,8 +33199,8 @@
         </p:nvSpPr>
         <p:spPr>
           <a:xfrm>
-            <a:off x="7260336" y="4718304"/>
-            <a:ext cx="1828800" cy="256032"/>
+            <a:off x="7260336" y="4392778"/>
+            <a:ext cx="1828800" cy="219456"/>
           </a:xfrm>
           <a:prstGeom prst="rect">
             <a:avLst/>
@@ -33222,7 +33216,7 @@
               <a:buNone/>
             </a:pPr>
             <a:r>
-              <a:rPr lang="en-US" sz="1150" dirty="0">
+              <a:rPr lang="en-US" sz="1050" dirty="0">
                 <a:solidFill>
                   <a:srgbClr val="3B3833"/>
                 </a:solidFill>
@@ -33232,7 +33226,7 @@
               </a:rPr>
               <a:t>静岡県</a:t>
             </a:r>
-            <a:endParaRPr lang="en-US" sz="1150" dirty="0"/>
+            <a:endParaRPr lang="en-US" sz="1050" dirty="0"/>
           </a:p>
         </p:txBody>
       </p:sp>
@@ -33244,8 +33238,8 @@
         </p:nvSpPr>
         <p:spPr>
           <a:xfrm>
-            <a:off x="9787738" y="4718304"/>
-            <a:ext cx="1426464" cy="256032"/>
+            <a:off x="9787738" y="4392778"/>
+            <a:ext cx="1426464" cy="219456"/>
           </a:xfrm>
           <a:prstGeom prst="rect">
             <a:avLst/>
@@ -33261,7 +33255,7 @@
               <a:buNone/>
             </a:pPr>
             <a:r>
-              <a:rPr lang="en-US" sz="1150" b="1" dirty="0">
+              <a:rPr lang="en-US" sz="1050" b="1" dirty="0">
                 <a:solidFill>
                   <a:srgbClr val="1B5E20"/>
                 </a:solidFill>
@@ -33271,7 +33265,7 @@
               </a:rPr>
               <a:t>1 店舗</a:t>
             </a:r>
-            <a:endParaRPr lang="en-US" sz="1150" dirty="0"/>
+            <a:endParaRPr lang="en-US" sz="1050" dirty="0"/>
           </a:p>
         </p:txBody>
       </p:sp>
@@ -33283,8 +33277,8 @@
         </p:nvSpPr>
         <p:spPr>
           <a:xfrm>
-            <a:off x="7260336" y="4992624"/>
-            <a:ext cx="1828800" cy="256032"/>
+            <a:off x="7260336" y="4623206"/>
+            <a:ext cx="1828800" cy="219456"/>
           </a:xfrm>
           <a:prstGeom prst="rect">
             <a:avLst/>
@@ -33300,7 +33294,7 @@
               <a:buNone/>
             </a:pPr>
             <a:r>
-              <a:rPr lang="en-US" sz="1150" dirty="0">
+              <a:rPr lang="en-US" sz="1050" dirty="0">
                 <a:solidFill>
                   <a:srgbClr val="3B3833"/>
                 </a:solidFill>
@@ -33310,7 +33304,7 @@
               </a:rPr>
               <a:t>滋賀県</a:t>
             </a:r>
-            <a:endParaRPr lang="en-US" sz="1150" dirty="0"/>
+            <a:endParaRPr lang="en-US" sz="1050" dirty="0"/>
           </a:p>
         </p:txBody>
       </p:sp>
@@ -33322,8 +33316,8 @@
         </p:nvSpPr>
         <p:spPr>
           <a:xfrm>
-            <a:off x="9787738" y="4992624"/>
-            <a:ext cx="1426464" cy="256032"/>
+            <a:off x="9787738" y="4623206"/>
+            <a:ext cx="1426464" cy="219456"/>
           </a:xfrm>
           <a:prstGeom prst="rect">
             <a:avLst/>
@@ -33339,7 +33333,7 @@
               <a:buNone/>
             </a:pPr>
             <a:r>
-              <a:rPr lang="en-US" sz="1150" b="1" dirty="0">
+              <a:rPr lang="en-US" sz="1050" b="1" dirty="0">
                 <a:solidFill>
                   <a:srgbClr val="1B5E20"/>
                 </a:solidFill>
@@ -33349,13 +33343,169 @@
               </a:rPr>
               <a:t>1 店舗</a:t>
             </a:r>
-            <a:endParaRPr lang="en-US" sz="1150" dirty="0"/>
-          </a:p>
-        </p:txBody>
-      </p:sp>
-      <p:sp>
-        <p:nvSpPr>
-          <p:cNvPr id="48" name="Shape 40"/>
+            <a:endParaRPr lang="en-US" sz="1050" dirty="0"/>
+          </a:p>
+        </p:txBody>
+      </p:sp>
+      <p:sp>
+        <p:nvSpPr>
+          <p:cNvPr id="48" name="Text 40"/>
+          <p:cNvSpPr/>
+          <p:nvPr/>
+        </p:nvSpPr>
+        <p:spPr>
+          <a:xfrm>
+            <a:off x="7260336" y="4853635"/>
+            <a:ext cx="1828800" cy="219456"/>
+          </a:xfrm>
+          <a:prstGeom prst="rect">
+            <a:avLst/>
+          </a:prstGeom>
+          <a:noFill/>
+          <a:ln/>
+        </p:spPr>
+        <p:txBody>
+          <a:bodyPr wrap="square" lIns="0" tIns="0" rIns="0" bIns="0" rtlCol="0" anchor="ctr"/>
+          <a:lstStyle/>
+          <a:p>
+            <a:pPr indent="0" marL="0">
+              <a:buNone/>
+            </a:pPr>
+            <a:r>
+              <a:rPr lang="en-US" sz="1050" dirty="0">
+                <a:solidFill>
+                  <a:srgbClr val="3B3833"/>
+                </a:solidFill>
+                <a:latin typeface="Noto Sans JP" pitchFamily="34" charset="0"/>
+                <a:ea typeface="Noto Sans JP" pitchFamily="34" charset="-122"/>
+                <a:cs typeface="Noto Sans JP" pitchFamily="34" charset="-120"/>
+              </a:rPr>
+              <a:t>三重県</a:t>
+            </a:r>
+            <a:endParaRPr lang="en-US" sz="1050" dirty="0"/>
+          </a:p>
+        </p:txBody>
+      </p:sp>
+      <p:sp>
+        <p:nvSpPr>
+          <p:cNvPr id="49" name="Text 41"/>
+          <p:cNvSpPr/>
+          <p:nvPr/>
+        </p:nvSpPr>
+        <p:spPr>
+          <a:xfrm>
+            <a:off x="9787738" y="4853635"/>
+            <a:ext cx="1426464" cy="219456"/>
+          </a:xfrm>
+          <a:prstGeom prst="rect">
+            <a:avLst/>
+          </a:prstGeom>
+          <a:noFill/>
+          <a:ln/>
+        </p:spPr>
+        <p:txBody>
+          <a:bodyPr wrap="square" lIns="0" tIns="0" rIns="0" bIns="0" rtlCol="0" anchor="ctr"/>
+          <a:lstStyle/>
+          <a:p>
+            <a:pPr algn="r" indent="0" marL="0">
+              <a:buNone/>
+            </a:pPr>
+            <a:r>
+              <a:rPr lang="en-US" sz="1050" b="1" dirty="0">
+                <a:solidFill>
+                  <a:srgbClr val="1B5E20"/>
+                </a:solidFill>
+                <a:latin typeface="Noto Sans JP" pitchFamily="34" charset="0"/>
+                <a:ea typeface="Noto Sans JP" pitchFamily="34" charset="-122"/>
+                <a:cs typeface="Noto Sans JP" pitchFamily="34" charset="-120"/>
+              </a:rPr>
+              <a:t>1 店舗</a:t>
+            </a:r>
+            <a:endParaRPr lang="en-US" sz="1050" dirty="0"/>
+          </a:p>
+        </p:txBody>
+      </p:sp>
+      <p:sp>
+        <p:nvSpPr>
+          <p:cNvPr id="50" name="Text 42"/>
+          <p:cNvSpPr/>
+          <p:nvPr/>
+        </p:nvSpPr>
+        <p:spPr>
+          <a:xfrm>
+            <a:off x="7260336" y="5084064"/>
+            <a:ext cx="1828800" cy="219456"/>
+          </a:xfrm>
+          <a:prstGeom prst="rect">
+            <a:avLst/>
+          </a:prstGeom>
+          <a:noFill/>
+          <a:ln/>
+        </p:spPr>
+        <p:txBody>
+          <a:bodyPr wrap="square" lIns="0" tIns="0" rIns="0" bIns="0" rtlCol="0" anchor="ctr"/>
+          <a:lstStyle/>
+          <a:p>
+            <a:pPr indent="0" marL="0">
+              <a:buNone/>
+            </a:pPr>
+            <a:r>
+              <a:rPr lang="en-US" sz="1050" dirty="0">
+                <a:solidFill>
+                  <a:srgbClr val="3B3833"/>
+                </a:solidFill>
+                <a:latin typeface="Noto Sans JP" pitchFamily="34" charset="0"/>
+                <a:ea typeface="Noto Sans JP" pitchFamily="34" charset="-122"/>
+                <a:cs typeface="Noto Sans JP" pitchFamily="34" charset="-120"/>
+              </a:rPr>
+              <a:t>鳥取県</a:t>
+            </a:r>
+            <a:endParaRPr lang="en-US" sz="1050" dirty="0"/>
+          </a:p>
+        </p:txBody>
+      </p:sp>
+      <p:sp>
+        <p:nvSpPr>
+          <p:cNvPr id="51" name="Text 43"/>
+          <p:cNvSpPr/>
+          <p:nvPr/>
+        </p:nvSpPr>
+        <p:spPr>
+          <a:xfrm>
+            <a:off x="9787738" y="5084064"/>
+            <a:ext cx="1426464" cy="219456"/>
+          </a:xfrm>
+          <a:prstGeom prst="rect">
+            <a:avLst/>
+          </a:prstGeom>
+          <a:noFill/>
+          <a:ln/>
+        </p:spPr>
+        <p:txBody>
+          <a:bodyPr wrap="square" lIns="0" tIns="0" rIns="0" bIns="0" rtlCol="0" anchor="ctr"/>
+          <a:lstStyle/>
+          <a:p>
+            <a:pPr algn="r" indent="0" marL="0">
+              <a:buNone/>
+            </a:pPr>
+            <a:r>
+              <a:rPr lang="en-US" sz="1050" b="1" dirty="0">
+                <a:solidFill>
+                  <a:srgbClr val="1B5E20"/>
+                </a:solidFill>
+                <a:latin typeface="Noto Sans JP" pitchFamily="34" charset="0"/>
+                <a:ea typeface="Noto Sans JP" pitchFamily="34" charset="-122"/>
+                <a:cs typeface="Noto Sans JP" pitchFamily="34" charset="-120"/>
+              </a:rPr>
+              <a:t>1 店舗</a:t>
+            </a:r>
+            <a:endParaRPr lang="en-US" sz="1050" dirty="0"/>
+          </a:p>
+        </p:txBody>
+      </p:sp>
+      <p:sp>
+        <p:nvSpPr>
+          <p:cNvPr id="52" name="Shape 44"/>
           <p:cNvSpPr/>
           <p:nvPr/>
         </p:nvSpPr>
@@ -33377,7 +33527,7 @@
       </p:sp>
       <p:sp>
         <p:nvSpPr>
-          <p:cNvPr id="49" name="Text 41"/>
+          <p:cNvPr id="53" name="Text 45"/>
           <p:cNvSpPr/>
           <p:nvPr/>
         </p:nvSpPr>
@@ -33604,7 +33754,7 @@
                 <a:ea typeface="Noto Sans JP" pitchFamily="34" charset="-122"/>
                 <a:cs typeface="Noto Sans JP" pitchFamily="34" charset="-120"/>
               </a:rPr>
-              <a:t>営業中店舗の開店月ベース累計（2022.09〜2026.08／単位：店舗）</a:t>
+              <a:t>営業中店舗の開店月ベース累計（2022.09〜2026.07／単位：店舗）</a:t>
             </a:r>
             <a:endParaRPr lang="en-US" sz="1150" dirty="0"/>
           </a:p>
@@ -33688,7 +33838,7 @@
                 <a:ea typeface="Arial" pitchFamily="34" charset="-122"/>
                 <a:cs typeface="Arial" pitchFamily="34" charset="-120"/>
               </a:rPr>
-              <a:t>70</a:t>
+              <a:t>71</a:t>
             </a:r>
             <a:pPr algn="l" indent="0" marL="0">
               <a:buNone/>
@@ -33702,7 +33852,7 @@
                 <a:ea typeface="Noto Sans JP" pitchFamily="34" charset="-122"/>
                 <a:cs typeface="Noto Sans JP" pitchFamily="34" charset="-120"/>
               </a:rPr>
-              <a:t> 店舗以上</a:t>
+              <a:t> 店舗</a:t>
             </a:r>
             <a:endParaRPr lang="en-US" sz="3400" dirty="0"/>
           </a:p>
@@ -33744,7 +33894,7 @@
                 <a:ea typeface="Noto Sans JP" pitchFamily="34" charset="-122"/>
                 <a:cs typeface="Noto Sans JP" pitchFamily="34" charset="-120"/>
               </a:rPr>
-              <a:t>2026年8月時点の営業中店舗数</a:t>
+              <a:t>2026年7月時点の営業中店舗数</a:t>
             </a:r>
             <a:endParaRPr lang="en-US" sz="1050" dirty="0"/>
           </a:p>
@@ -33817,7 +33967,7 @@
                 <a:ea typeface="Arial" pitchFamily="34" charset="-122"/>
                 <a:cs typeface="Arial" pitchFamily="34" charset="-120"/>
               </a:rPr>
-              <a:t>9</a:t>
+              <a:t>11</a:t>
             </a:r>
             <a:pPr algn="l" indent="0" marL="0">
               <a:buNone/>
@@ -33873,7 +34023,7 @@
                 <a:ea typeface="Noto Sans JP" pitchFamily="34" charset="-122"/>
                 <a:cs typeface="Noto Sans JP" pitchFamily="34" charset="-120"/>
               </a:rPr>
-              <a:t>東北から関西まで広がる展開エリア</a:t>
+              <a:t>東北〜中国地方に広がる展開エリア</a:t>
             </a:r>
             <a:endParaRPr lang="en-US" sz="1050" dirty="0"/>
           </a:p>
@@ -33946,7 +34096,7 @@
                 <a:ea typeface="Arial" pitchFamily="34" charset="-122"/>
                 <a:cs typeface="Arial" pitchFamily="34" charset="-120"/>
               </a:rPr>
-              <a:t>47</a:t>
+              <a:t>46</a:t>
             </a:r>
             <a:pPr algn="l" indent="0" marL="0">
               <a:buNone/>
